--- a/PPTs/Ch9_64_bit_data_processing.pptx
+++ b/PPTs/Ch9_64_bit_data_processing.pptx
@@ -5274,7 +5274,7 @@
           <a:p>
             <a:r>
               <a:rPr lang="en-US" dirty="0"/>
-              <a:t>Fall 2025</a:t>
+              <a:t>Fall 2026</a:t>
             </a:r>
           </a:p>
         </p:txBody>
@@ -5445,7 +5445,7 @@
           <a:p>
             <a:r>
               <a:rPr lang="en-US" dirty="0"/>
-              <a:t>64-bit Logic Shift Left</a:t>
+              <a:t>64-bit Logical Shift Left</a:t>
             </a:r>
           </a:p>
         </p:txBody>
@@ -5904,7 +5904,7 @@
                 </a:solidFill>
                 <a:latin typeface="Consolas" panose="020B0609020204030204" pitchFamily="49" charset="0"/>
               </a:rPr>
-              <a:t>R4 (R3, LSL #3)</a:t>
+              <a:t>R4 (R3, LSR #29)</a:t>
             </a:r>
           </a:p>
         </p:txBody>
@@ -5956,7 +5956,7 @@
           <a:p>
             <a:r>
               <a:rPr lang="en-US" dirty="0"/>
-              <a:t>64-bit Logic Shift Right</a:t>
+              <a:t>64-bit Logical Shift Right</a:t>
             </a:r>
           </a:p>
         </p:txBody>
@@ -6056,7 +6056,7 @@
           <a:p>
             <a:r>
               <a:rPr lang="en-US" dirty="0"/>
-              <a:t>64-bit Logic Shift Right</a:t>
+              <a:t>64-bit Logical Shift Right</a:t>
             </a:r>
           </a:p>
         </p:txBody>
@@ -6109,7 +6109,7 @@
           <a:p>
             <a:r>
               <a:rPr lang="en-US" dirty="0"/>
-              <a:t>Example of Logic Shift Right by 3</a:t>
+              <a:t>Example of Logical Shift Right by 3</a:t>
             </a:r>
           </a:p>
         </p:txBody>
@@ -6215,7 +6215,7 @@
           <a:p>
             <a:r>
               <a:rPr lang="en-US" dirty="0"/>
-              <a:t>64-bit Logic Shift Right</a:t>
+              <a:t>64-bit Logical Shift Right</a:t>
             </a:r>
           </a:p>
         </p:txBody>
@@ -6424,7 +6424,7 @@
                 </a:solidFill>
                 <a:latin typeface="Consolas" panose="020B0609020204030204" pitchFamily="49" charset="0"/>
               </a:rPr>
-              <a:t>ORR r0, r0, r3, LSL 29  </a:t>
+              <a:t xml:space="preserve">ORR r0, r0, r3, LSL #29  </a:t>
             </a:r>
             <a:r>
               <a:rPr lang="en-US" dirty="0">
@@ -8650,7 +8650,7 @@
                 <a:latin typeface="Consolas" panose="020B0609020204030204" pitchFamily="49" charset="0"/>
                 <a:cs typeface="Consolas" panose="020B0609020204030204" pitchFamily="49" charset="0"/>
               </a:rPr>
-              <a:t>; C[64:32] = A[64:32] + B[64:32] + Carry</a:t>
+              <a:t>; C[63:32] = A[63:32] + B[63:32] + Carry</a:t>
             </a:r>
           </a:p>
         </p:txBody>
@@ -8748,7 +8748,7 @@
           <a:p>
             <a:r>
               <a:rPr lang="en-US" dirty="0"/>
-              <a:t>It uses ADDS (add with carry update) and ADC (add with carry) instructions to compute the 64-bit result across two 32-bit parts with carry propagation.</a:t>
+              <a:t>It uses ADDS (add and update flags, including Carry) and ADC (add with carry) instructions to compute the 64-bit result across two 32-bit parts with carry propagation.</a:t>
             </a:r>
           </a:p>
         </p:txBody>
@@ -9427,7 +9427,7 @@
                 <a:latin typeface="Consolas" panose="020B0609020204030204" pitchFamily="49" charset="0"/>
                 <a:cs typeface="Consolas" panose="020B0609020204030204" pitchFamily="49" charset="0"/>
               </a:rPr>
-              <a:t>  ; Subtract A from B</a:t>
+              <a:t xml:space="preserve">  ; Subtract B from A</a:t>
             </a:r>
           </a:p>
           <a:p>
@@ -9615,7 +9615,7 @@
                 <a:latin typeface="Consolas" panose="020B0609020204030204" pitchFamily="49" charset="0"/>
                 <a:cs typeface="Consolas" panose="020B0609020204030204" pitchFamily="49" charset="0"/>
               </a:rPr>
-              <a:t>; C[64:32] = A[64:32] - B[64:32] + Carry - 1 </a:t>
+              <a:t xml:space="preserve">; C[63:32] = A[63:32] - B[63:32] + Carry - 1 </a:t>
             </a:r>
           </a:p>
         </p:txBody>
@@ -9713,7 +9713,7 @@
           <a:p>
             <a:r>
               <a:rPr lang="en-US" dirty="0"/>
-              <a:t>It uses SUBS (subtract with carry update) and SBC (subtract with carry) instructions with borrow (= not Carry) to handle the two-part subtraction.</a:t>
+              <a:t>It uses SUBS (subtract and update flags, including Carry) and SBC (subtract with carry) instructions with borrow (= not Carry) to handle the two-part subtraction.</a:t>
             </a:r>
           </a:p>
         </p:txBody>
@@ -9834,7 +9834,7 @@
               <a:buNone/>
             </a:pPr>
             <a:r>
-              <a:rPr lang="en-US" sz="1600" b="1" dirty="0">
+              <a:rPr lang="en-US" sz="1400" b="1" dirty="0">
                 <a:solidFill>
                   <a:schemeClr val="bg1">
                     <a:lumMod val="50000"/>
@@ -9846,7 +9846,7 @@
               <a:t> ; 64-bit input data = (</a:t>
             </a:r>
             <a:r>
-              <a:rPr lang="en-US" sz="1600" b="1" dirty="0" err="1">
+              <a:rPr lang="en-US" sz="1400" b="1" dirty="0" err="1">
                 <a:solidFill>
                   <a:schemeClr val="bg1">
                     <a:lumMod val="50000"/>
@@ -9858,7 +9858,7 @@
               <a:t>r1:r0</a:t>
             </a:r>
             <a:r>
-              <a:rPr lang="en-US" sz="1600" b="1" dirty="0">
+              <a:rPr lang="en-US" sz="1400" b="1" dirty="0">
                 <a:solidFill>
                   <a:schemeClr val="bg1">
                     <a:lumMod val="50000"/>
@@ -9870,7 +9870,7 @@
               <a:t>), </a:t>
             </a:r>
             <a:r>
-              <a:rPr lang="en-US" sz="1600" b="1" dirty="0" err="1">
+              <a:rPr lang="en-US" sz="1400" b="1" dirty="0" err="1">
                 <a:solidFill>
                   <a:schemeClr val="bg1">
                     <a:lumMod val="50000"/>
@@ -9882,7 +9882,7 @@
               <a:t>r1</a:t>
             </a:r>
             <a:r>
-              <a:rPr lang="en-US" sz="1600" b="1" dirty="0">
+              <a:rPr lang="en-US" sz="1400" b="1" dirty="0">
                 <a:solidFill>
                   <a:schemeClr val="bg1">
                     <a:lumMod val="50000"/>
@@ -9894,7 +9894,7 @@
               <a:t> = upper word, </a:t>
             </a:r>
             <a:r>
-              <a:rPr lang="en-US" sz="1600" b="1" dirty="0" err="1">
+              <a:rPr lang="en-US" sz="1400" b="1" dirty="0" err="1">
                 <a:solidFill>
                   <a:schemeClr val="bg1">
                     <a:lumMod val="50000"/>
@@ -9906,7 +9906,7 @@
               <a:t>r0</a:t>
             </a:r>
             <a:r>
-              <a:rPr lang="en-US" sz="1600" b="1" dirty="0">
+              <a:rPr lang="en-US" sz="1400" b="1" dirty="0">
                 <a:solidFill>
                   <a:schemeClr val="bg1">
                     <a:lumMod val="50000"/>
@@ -9923,7 +9923,7 @@
               <a:buNone/>
             </a:pPr>
             <a:r>
-              <a:rPr lang="en-US" sz="1600" b="1" dirty="0">
+              <a:rPr lang="en-US" sz="1400" b="1" dirty="0">
                 <a:solidFill>
                   <a:schemeClr val="bg1">
                     <a:lumMod val="50000"/>
@@ -9935,7 +9935,7 @@
               <a:t> ; </a:t>
             </a:r>
             <a:r>
-              <a:rPr lang="en-US" sz="1600" b="1" dirty="0" err="1">
+              <a:rPr lang="en-US" sz="1400" b="1" dirty="0" err="1">
                 <a:solidFill>
                   <a:schemeClr val="bg1">
                     <a:lumMod val="50000"/>
@@ -9947,7 +9947,7 @@
               <a:t>r2</a:t>
             </a:r>
             <a:r>
-              <a:rPr lang="en-US" sz="1600" b="1" dirty="0">
+              <a:rPr lang="en-US" sz="1400" b="1" dirty="0">
                 <a:solidFill>
                   <a:schemeClr val="bg1">
                     <a:lumMod val="50000"/>
@@ -9964,7 +9964,7 @@
               <a:buNone/>
             </a:pPr>
             <a:r>
-              <a:rPr lang="en-US" sz="1600" b="1" dirty="0">
+              <a:rPr lang="en-US" sz="1400" b="1" dirty="0">
                 <a:solidFill>
                   <a:schemeClr val="bg1">
                     <a:lumMod val="50000"/>
@@ -9981,7 +9981,7 @@
               <a:buNone/>
             </a:pPr>
             <a:r>
-              <a:rPr lang="en-US" sz="1600" b="1" dirty="0">
+              <a:rPr lang="en-US" sz="1400" b="1" dirty="0">
                 <a:solidFill>
                   <a:schemeClr val="bg1">
                     <a:lumMod val="50000"/>
@@ -9998,14 +9998,14 @@
               <a:buNone/>
             </a:pPr>
             <a:r>
-              <a:rPr lang="en-US" sz="1600" b="1" dirty="0">
+              <a:rPr lang="en-US" sz="1400" b="1" dirty="0">
                 <a:latin typeface="Consolas" panose="020B0609020204030204" pitchFamily="49" charset="0"/>
                 <a:cs typeface="Consolas" panose="020B0609020204030204" pitchFamily="49" charset="0"/>
               </a:rPr>
               <a:t> </a:t>
             </a:r>
             <a:r>
-              <a:rPr lang="en-US" sz="1600" b="1" dirty="0" err="1">
+              <a:rPr lang="en-US" sz="1400" b="1" dirty="0" err="1">
                 <a:solidFill>
                   <a:srgbClr val="C00000"/>
                 </a:solidFill>
@@ -10015,7 +10015,7 @@
               <a:t>CLZ</a:t>
             </a:r>
             <a:r>
-              <a:rPr lang="en-US" sz="1600" b="1" dirty="0">
+              <a:rPr lang="en-US" sz="1400" b="1" dirty="0">
                 <a:solidFill>
                   <a:srgbClr val="C00000"/>
                 </a:solidFill>
@@ -10025,7 +10025,7 @@
               <a:t>  </a:t>
             </a:r>
             <a:r>
-              <a:rPr lang="en-US" sz="1600" b="1" dirty="0" err="1">
+              <a:rPr lang="en-US" sz="1400" b="1" dirty="0" err="1">
                 <a:solidFill>
                   <a:srgbClr val="C00000"/>
                 </a:solidFill>
@@ -10035,7 +10035,7 @@
               <a:t>r2</a:t>
             </a:r>
             <a:r>
-              <a:rPr lang="en-US" sz="1600" b="1" dirty="0">
+              <a:rPr lang="en-US" sz="1400" b="1" dirty="0">
                 <a:solidFill>
                   <a:srgbClr val="C00000"/>
                 </a:solidFill>
@@ -10045,7 +10045,7 @@
               <a:t>, </a:t>
             </a:r>
             <a:r>
-              <a:rPr lang="en-US" sz="1600" b="1" dirty="0" err="1">
+              <a:rPr lang="en-US" sz="1400" b="1" dirty="0" err="1">
                 <a:solidFill>
                   <a:srgbClr val="C00000"/>
                 </a:solidFill>
@@ -10055,7 +10055,7 @@
               <a:t>r1</a:t>
             </a:r>
             <a:r>
-              <a:rPr lang="en-US" sz="1600" b="1" dirty="0">
+              <a:rPr lang="en-US" sz="1400" b="1" dirty="0">
                 <a:solidFill>
                   <a:srgbClr val="C00000"/>
                 </a:solidFill>
@@ -10065,7 +10065,7 @@
               <a:t>          </a:t>
             </a:r>
             <a:r>
-              <a:rPr lang="en-US" sz="1600" b="1" dirty="0">
+              <a:rPr lang="en-US" sz="1400" b="1" dirty="0">
                 <a:solidFill>
                   <a:schemeClr val="bg1">
                     <a:lumMod val="50000"/>
@@ -10077,7 +10077,7 @@
               <a:t>; </a:t>
             </a:r>
             <a:r>
-              <a:rPr lang="en-US" sz="1600" b="1" dirty="0" err="1">
+              <a:rPr lang="en-US" sz="1400" b="1" dirty="0" err="1">
                 <a:solidFill>
                   <a:schemeClr val="bg1">
                     <a:lumMod val="50000"/>
@@ -10089,7 +10089,7 @@
               <a:t>CLZ</a:t>
             </a:r>
             <a:r>
-              <a:rPr lang="en-US" sz="1600" b="1" dirty="0">
+              <a:rPr lang="en-US" sz="1400" b="1" dirty="0">
                 <a:solidFill>
                   <a:schemeClr val="bg1">
                     <a:lumMod val="50000"/>
@@ -10106,7 +10106,7 @@
               <a:buNone/>
             </a:pPr>
             <a:r>
-              <a:rPr lang="en-US" sz="1600" b="1" dirty="0">
+              <a:rPr lang="en-US" sz="1400" b="1" dirty="0">
                 <a:latin typeface="Consolas" panose="020B0609020204030204" pitchFamily="49" charset="0"/>
                 <a:cs typeface="Consolas" panose="020B0609020204030204" pitchFamily="49" charset="0"/>
               </a:rPr>
@@ -10118,7 +10118,7 @@
               <a:buNone/>
             </a:pPr>
             <a:r>
-              <a:rPr lang="en-US" sz="1600" b="1" dirty="0">
+              <a:rPr lang="en-US" sz="1400" b="1" dirty="0">
                 <a:solidFill>
                   <a:schemeClr val="bg1">
                     <a:lumMod val="50000"/>
@@ -10135,14 +10135,14 @@
               <a:buNone/>
             </a:pPr>
             <a:r>
-              <a:rPr lang="en-US" sz="1600" b="1" dirty="0">
+              <a:rPr lang="en-US" sz="1400" b="1" dirty="0">
                 <a:latin typeface="Consolas" panose="020B0609020204030204" pitchFamily="49" charset="0"/>
                 <a:cs typeface="Consolas" panose="020B0609020204030204" pitchFamily="49" charset="0"/>
               </a:rPr>
               <a:t> </a:t>
             </a:r>
             <a:r>
-              <a:rPr lang="en-US" sz="1600" b="1" dirty="0" err="1">
+              <a:rPr lang="en-US" sz="1400" b="1" dirty="0" err="1">
                 <a:solidFill>
                   <a:srgbClr val="C00000"/>
                 </a:solidFill>
@@ -10152,7 +10152,7 @@
               <a:t>CMP</a:t>
             </a:r>
             <a:r>
-              <a:rPr lang="en-US" sz="1600" b="1" dirty="0">
+              <a:rPr lang="en-US" sz="1400" b="1" dirty="0">
                 <a:solidFill>
                   <a:srgbClr val="C00000"/>
                 </a:solidFill>
@@ -10162,7 +10162,7 @@
               <a:t>	</a:t>
             </a:r>
             <a:r>
-              <a:rPr lang="en-US" sz="1600" b="1" dirty="0" err="1">
+              <a:rPr lang="en-US" sz="1400" b="1" dirty="0" err="1">
                 <a:solidFill>
                   <a:srgbClr val="C00000"/>
                 </a:solidFill>
@@ -10172,7 +10172,7 @@
               <a:t>r2</a:t>
             </a:r>
             <a:r>
-              <a:rPr lang="en-US" sz="1600" b="1" dirty="0">
+              <a:rPr lang="en-US" sz="1400" b="1" dirty="0">
                 <a:solidFill>
                   <a:srgbClr val="C00000"/>
                 </a:solidFill>
@@ -10187,107 +10187,33 @@
               <a:buNone/>
             </a:pPr>
             <a:r>
-              <a:rPr lang="en-US" sz="1600" b="1" dirty="0">
+              <a:rPr lang="en-US" sz="1400" b="1" dirty="0">
                 <a:latin typeface="Consolas" panose="020B0609020204030204" pitchFamily="49" charset="0"/>
                 <a:cs typeface="Consolas" panose="020B0609020204030204" pitchFamily="49" charset="0"/>
               </a:rPr>
               <a:t> </a:t>
             </a:r>
             <a:r>
-              <a:rPr lang="en-US" sz="1600" b="1" dirty="0" err="1">
-                <a:solidFill>
-                  <a:srgbClr val="C00000"/>
-                </a:solidFill>
-                <a:latin typeface="Consolas" panose="020B0609020204030204" pitchFamily="49" charset="0"/>
-                <a:cs typeface="Consolas" panose="020B0609020204030204" pitchFamily="49" charset="0"/>
-              </a:rPr>
-              <a:t>CLZEQ</a:t>
-            </a:r>
-            <a:r>
-              <a:rPr lang="en-US" sz="1600" b="1" dirty="0">
-                <a:solidFill>
-                  <a:srgbClr val="C00000"/>
-                </a:solidFill>
-                <a:latin typeface="Consolas" panose="020B0609020204030204" pitchFamily="49" charset="0"/>
-                <a:cs typeface="Consolas" panose="020B0609020204030204" pitchFamily="49" charset="0"/>
-              </a:rPr>
-              <a:t>  </a:t>
-            </a:r>
-            <a:r>
-              <a:rPr lang="en-US" sz="1600" b="1" dirty="0" err="1">
-                <a:solidFill>
-                  <a:srgbClr val="C00000"/>
-                </a:solidFill>
-                <a:latin typeface="Consolas" panose="020B0609020204030204" pitchFamily="49" charset="0"/>
-                <a:cs typeface="Consolas" panose="020B0609020204030204" pitchFamily="49" charset="0"/>
-              </a:rPr>
-              <a:t>r3</a:t>
-            </a:r>
-            <a:r>
-              <a:rPr lang="en-US" sz="1600" b="1" dirty="0">
-                <a:solidFill>
-                  <a:srgbClr val="C00000"/>
-                </a:solidFill>
-                <a:latin typeface="Consolas" panose="020B0609020204030204" pitchFamily="49" charset="0"/>
-                <a:cs typeface="Consolas" panose="020B0609020204030204" pitchFamily="49" charset="0"/>
-              </a:rPr>
-              <a:t>, </a:t>
-            </a:r>
-            <a:r>
-              <a:rPr lang="en-US" sz="1600" b="1" dirty="0" err="1">
-                <a:solidFill>
-                  <a:srgbClr val="C00000"/>
-                </a:solidFill>
-                <a:latin typeface="Consolas" panose="020B0609020204030204" pitchFamily="49" charset="0"/>
-                <a:cs typeface="Consolas" panose="020B0609020204030204" pitchFamily="49" charset="0"/>
-              </a:rPr>
-              <a:t>r0</a:t>
-            </a:r>
-            <a:r>
-              <a:rPr lang="en-US" sz="1600" b="1" dirty="0">
-                <a:solidFill>
-                  <a:srgbClr val="C00000"/>
-                </a:solidFill>
-                <a:latin typeface="Consolas" panose="020B0609020204030204" pitchFamily="49" charset="0"/>
-                <a:cs typeface="Consolas" panose="020B0609020204030204" pitchFamily="49" charset="0"/>
-              </a:rPr>
-              <a:t>        </a:t>
-            </a:r>
-            <a:r>
-              <a:rPr lang="en-US" sz="1600" b="1" dirty="0">
-                <a:solidFill>
-                  <a:schemeClr val="bg1">
-                    <a:lumMod val="50000"/>
-                  </a:schemeClr>
-                </a:solidFill>
-                <a:latin typeface="Consolas" panose="020B0609020204030204" pitchFamily="49" charset="0"/>
-                <a:cs typeface="Consolas" panose="020B0609020204030204" pitchFamily="49" charset="0"/>
-              </a:rPr>
-              <a:t>; if </a:t>
-            </a:r>
-            <a:r>
-              <a:rPr lang="en-US" sz="1600" b="1" dirty="0" err="1">
-                <a:solidFill>
-                  <a:schemeClr val="bg1">
-                    <a:lumMod val="50000"/>
-                  </a:schemeClr>
-                </a:solidFill>
-                <a:latin typeface="Consolas" panose="020B0609020204030204" pitchFamily="49" charset="0"/>
-                <a:cs typeface="Consolas" panose="020B0609020204030204" pitchFamily="49" charset="0"/>
-              </a:rPr>
-              <a:t>r2</a:t>
-            </a:r>
-            <a:r>
-              <a:rPr lang="en-US" sz="1600" b="1" dirty="0">
-                <a:solidFill>
-                  <a:schemeClr val="bg1">
-                    <a:lumMod val="50000"/>
-                  </a:schemeClr>
-                </a:solidFill>
-                <a:latin typeface="Consolas" panose="020B0609020204030204" pitchFamily="49" charset="0"/>
-                <a:cs typeface="Consolas" panose="020B0609020204030204" pitchFamily="49" charset="0"/>
-              </a:rPr>
-              <a:t> == 32, then count leading zero</a:t>
+              <a:rPr lang="en-US" sz="1400" b="1" dirty="0">
+                <a:solidFill>
+                  <a:srgbClr val="C00000"/>
+                </a:solidFill>
+                <a:latin typeface="Consolas" panose="020B0609020204030204" pitchFamily="49" charset="0"/>
+                <a:cs typeface="Consolas" panose="020B0609020204030204" pitchFamily="49" charset="0"/>
+              </a:rPr>
+              <a:t>ITT   EQ             </a:t>
+            </a:r>
+            <a:r>
+              <a:rPr lang="en-US" sz="1400" b="1" dirty="0">
+                <a:solidFill>
+                  <a:schemeClr val="bg1">
+                    <a:lumMod val="50000"/>
+                  </a:schemeClr>
+                </a:solidFill>
+                <a:latin typeface="Consolas" panose="020B0609020204030204" pitchFamily="49" charset="0"/>
+                <a:cs typeface="Consolas" panose="020B0609020204030204" pitchFamily="49" charset="0"/>
+              </a:rPr>
+              <a:t>; next 2 instrs run only if EQ</a:t>
             </a:r>
           </a:p>
           <a:p>
@@ -10295,23 +10221,131 @@
               <a:buNone/>
             </a:pPr>
             <a:r>
-              <a:rPr lang="en-US" sz="1600" b="1" dirty="0">
-                <a:solidFill>
-                  <a:schemeClr val="bg1">
-                    <a:lumMod val="50000"/>
-                  </a:schemeClr>
-                </a:solidFill>
-                <a:latin typeface="Consolas" panose="020B0609020204030204" pitchFamily="49" charset="0"/>
-                <a:cs typeface="Consolas" panose="020B0609020204030204" pitchFamily="49" charset="0"/>
-              </a:rPr>
-              <a:t>                      ; bits of the lower word</a:t>
+              <a:rPr lang="en-US" sz="1400" b="1" dirty="0">
+                <a:latin typeface="Consolas" panose="020B0609020204030204" pitchFamily="49" charset="0"/>
+                <a:cs typeface="Consolas" panose="020B0609020204030204" pitchFamily="49" charset="0"/>
+              </a:rPr>
+              <a:t> </a:t>
+            </a:r>
+            <a:r>
+              <a:rPr lang="en-US" sz="1400" b="1" dirty="0" err="1">
+                <a:solidFill>
+                  <a:srgbClr val="C00000"/>
+                </a:solidFill>
+                <a:latin typeface="Consolas" panose="020B0609020204030204" pitchFamily="49" charset="0"/>
+                <a:cs typeface="Consolas" panose="020B0609020204030204" pitchFamily="49" charset="0"/>
+              </a:rPr>
+              <a:t>CLZEQ</a:t>
+            </a:r>
+            <a:r>
+              <a:rPr lang="en-US" sz="1400" b="1" dirty="0">
+                <a:solidFill>
+                  <a:srgbClr val="C00000"/>
+                </a:solidFill>
+                <a:latin typeface="Consolas" panose="020B0609020204030204" pitchFamily="49" charset="0"/>
+                <a:cs typeface="Consolas" panose="020B0609020204030204" pitchFamily="49" charset="0"/>
+              </a:rPr>
+              <a:t>  </a:t>
+            </a:r>
+            <a:r>
+              <a:rPr lang="en-US" sz="1400" b="1" dirty="0" err="1">
+                <a:solidFill>
+                  <a:srgbClr val="C00000"/>
+                </a:solidFill>
+                <a:latin typeface="Consolas" panose="020B0609020204030204" pitchFamily="49" charset="0"/>
+                <a:cs typeface="Consolas" panose="020B0609020204030204" pitchFamily="49" charset="0"/>
+              </a:rPr>
+              <a:t>r3</a:t>
+            </a:r>
+            <a:r>
+              <a:rPr lang="en-US" sz="1400" b="1" dirty="0">
+                <a:solidFill>
+                  <a:srgbClr val="C00000"/>
+                </a:solidFill>
+                <a:latin typeface="Consolas" panose="020B0609020204030204" pitchFamily="49" charset="0"/>
+                <a:cs typeface="Consolas" panose="020B0609020204030204" pitchFamily="49" charset="0"/>
+              </a:rPr>
+              <a:t>, </a:t>
+            </a:r>
+            <a:r>
+              <a:rPr lang="en-US" sz="1400" b="1" dirty="0" err="1">
+                <a:solidFill>
+                  <a:srgbClr val="C00000"/>
+                </a:solidFill>
+                <a:latin typeface="Consolas" panose="020B0609020204030204" pitchFamily="49" charset="0"/>
+                <a:cs typeface="Consolas" panose="020B0609020204030204" pitchFamily="49" charset="0"/>
+              </a:rPr>
+              <a:t>r0</a:t>
+            </a:r>
+            <a:r>
+              <a:rPr lang="en-US" sz="1400" b="1" dirty="0">
+                <a:solidFill>
+                  <a:srgbClr val="C00000"/>
+                </a:solidFill>
+                <a:latin typeface="Consolas" panose="020B0609020204030204" pitchFamily="49" charset="0"/>
+                <a:cs typeface="Consolas" panose="020B0609020204030204" pitchFamily="49" charset="0"/>
+              </a:rPr>
+              <a:t>        </a:t>
+            </a:r>
+            <a:r>
+              <a:rPr lang="en-US" sz="1400" b="1" dirty="0">
+                <a:solidFill>
+                  <a:schemeClr val="bg1">
+                    <a:lumMod val="50000"/>
+                  </a:schemeClr>
+                </a:solidFill>
+                <a:latin typeface="Consolas" panose="020B0609020204030204" pitchFamily="49" charset="0"/>
+                <a:cs typeface="Consolas" panose="020B0609020204030204" pitchFamily="49" charset="0"/>
+              </a:rPr>
+              <a:t>; if </a:t>
+            </a:r>
+            <a:r>
+              <a:rPr lang="en-US" sz="1400" b="1" dirty="0" err="1">
+                <a:solidFill>
+                  <a:schemeClr val="bg1">
+                    <a:lumMod val="50000"/>
+                  </a:schemeClr>
+                </a:solidFill>
+                <a:latin typeface="Consolas" panose="020B0609020204030204" pitchFamily="49" charset="0"/>
+                <a:cs typeface="Consolas" panose="020B0609020204030204" pitchFamily="49" charset="0"/>
+              </a:rPr>
+              <a:t>r2</a:t>
+            </a:r>
+            <a:r>
+              <a:rPr lang="en-US" sz="1400" b="1" dirty="0">
+                <a:solidFill>
+                  <a:schemeClr val="bg1">
+                    <a:lumMod val="50000"/>
+                  </a:schemeClr>
+                </a:solidFill>
+                <a:latin typeface="Consolas" panose="020B0609020204030204" pitchFamily="49" charset="0"/>
+                <a:cs typeface="Consolas" panose="020B0609020204030204" pitchFamily="49" charset="0"/>
+              </a:rPr>
+              <a:t> == 32, then count leading zero</a:t>
             </a:r>
           </a:p>
           <a:p>
             <a:pPr marL="0" indent="0">
               <a:buNone/>
             </a:pPr>
-            <a:endParaRPr lang="en-US" sz="1600" b="1" dirty="0">
+            <a:r>
+              <a:rPr lang="en-US" sz="1400" b="1" dirty="0">
+                <a:solidFill>
+                  <a:schemeClr val="bg1">
+                    <a:lumMod val="50000"/>
+                  </a:schemeClr>
+                </a:solidFill>
+                <a:latin typeface="Consolas" panose="020B0609020204030204" pitchFamily="49" charset="0"/>
+                <a:cs typeface="Consolas" panose="020B0609020204030204" pitchFamily="49" charset="0"/>
+              </a:rPr>
+              <a:t>                      ; bits of the lower word</a:t>
+            </a:r>
+          </a:p>
+          <a:p>
+            <a:pPr marL="0" indent="0">
+              <a:buNone/>
+            </a:pPr>
+            <a:endParaRPr lang="en-US" sz="1400" b="1" dirty="0">
               <a:solidFill>
                 <a:schemeClr val="bg1">
                   <a:lumMod val="50000"/>
@@ -10326,14 +10360,14 @@
               <a:buNone/>
             </a:pPr>
             <a:r>
-              <a:rPr lang="en-US" sz="1600" b="1" dirty="0">
+              <a:rPr lang="en-US" sz="1400" b="1" dirty="0">
                 <a:latin typeface="Consolas" panose="020B0609020204030204" pitchFamily="49" charset="0"/>
                 <a:cs typeface="Consolas" panose="020B0609020204030204" pitchFamily="49" charset="0"/>
               </a:rPr>
               <a:t> </a:t>
             </a:r>
             <a:r>
-              <a:rPr lang="en-US" sz="1600" b="1" dirty="0" err="1">
+              <a:rPr lang="en-US" sz="1400" b="1" dirty="0" err="1">
                 <a:solidFill>
                   <a:srgbClr val="C00000"/>
                 </a:solidFill>
@@ -10343,7 +10377,7 @@
               <a:t>ADDEQ</a:t>
             </a:r>
             <a:r>
-              <a:rPr lang="en-US" sz="1600" b="1" dirty="0">
+              <a:rPr lang="en-US" sz="1400" b="1" dirty="0">
                 <a:solidFill>
                   <a:srgbClr val="C00000"/>
                 </a:solidFill>
@@ -10353,7 +10387,7 @@
               <a:t>  </a:t>
             </a:r>
             <a:r>
-              <a:rPr lang="en-US" sz="1600" b="1" dirty="0" err="1">
+              <a:rPr lang="en-US" sz="1400" b="1" dirty="0" err="1">
                 <a:solidFill>
                   <a:srgbClr val="C00000"/>
                 </a:solidFill>
@@ -10363,7 +10397,7 @@
               <a:t>r2</a:t>
             </a:r>
             <a:r>
-              <a:rPr lang="en-US" sz="1600" b="1" dirty="0">
+              <a:rPr lang="en-US" sz="1400" b="1" dirty="0">
                 <a:solidFill>
                   <a:srgbClr val="C00000"/>
                 </a:solidFill>
@@ -10373,7 +10407,7 @@
               <a:t>, </a:t>
             </a:r>
             <a:r>
-              <a:rPr lang="en-US" sz="1600" b="1" dirty="0" err="1">
+              <a:rPr lang="en-US" sz="1400" b="1" dirty="0" err="1">
                 <a:solidFill>
                   <a:srgbClr val="C00000"/>
                 </a:solidFill>
@@ -10383,7 +10417,7 @@
               <a:t>r2</a:t>
             </a:r>
             <a:r>
-              <a:rPr lang="en-US" sz="1600" b="1" dirty="0">
+              <a:rPr lang="en-US" sz="1400" b="1" dirty="0">
                 <a:solidFill>
                   <a:srgbClr val="C00000"/>
                 </a:solidFill>
@@ -10393,7 +10427,7 @@
               <a:t>, </a:t>
             </a:r>
             <a:r>
-              <a:rPr lang="en-US" sz="1600" b="1" dirty="0" err="1">
+              <a:rPr lang="en-US" sz="1400" b="1" dirty="0" err="1">
                 <a:solidFill>
                   <a:srgbClr val="C00000"/>
                 </a:solidFill>
@@ -10403,7 +10437,7 @@
               <a:t>r3</a:t>
             </a:r>
             <a:r>
-              <a:rPr lang="en-US" sz="1600" b="1" dirty="0">
+              <a:rPr lang="en-US" sz="1400" b="1" dirty="0">
                 <a:solidFill>
                   <a:srgbClr val="C00000"/>
                 </a:solidFill>
@@ -10413,7 +10447,7 @@
               <a:t>    </a:t>
             </a:r>
             <a:r>
-              <a:rPr lang="en-US" sz="1600" b="1" dirty="0">
+              <a:rPr lang="en-US" sz="1400" b="1" dirty="0">
                 <a:solidFill>
                   <a:schemeClr val="bg1">
                     <a:lumMod val="50000"/>
@@ -10430,7 +10464,7 @@
               <a:buNone/>
             </a:pPr>
             <a:r>
-              <a:rPr lang="en-US" sz="1600" b="1" dirty="0">
+              <a:rPr lang="en-US" sz="1400" b="1" dirty="0">
                 <a:solidFill>
                   <a:schemeClr val="bg1">
                     <a:lumMod val="50000"/>
@@ -10565,7 +10599,7 @@
           <a:p>
             <a:r>
               <a:rPr lang="en-US" dirty="0"/>
-              <a:t>Compare r2 with 32: CMP r2, #32; if equal, the upper word is zero, so count lower: CLZEQ r3, r0; then ADDEQ r2, r2, r3 to add the lower’s leading zeros for the total over 64 bits.</a:t>
+              <a:t>Compare r2 with 32: CMP r2, #32; if equal, the upper word is zero, so count lower: ITT EQ (on Cortex-M, makes the next two instructions conditional on EQ); CLZEQ r3, r0; then ADDEQ r2, r2, r3 to add the lower’s leading zeros for the total over 64 bits.</a:t>
             </a:r>
           </a:p>
           <a:p>
@@ -10821,7 +10855,7 @@
                 <a:latin typeface="Consolas" panose="020B0609020204030204" pitchFamily="49" charset="0"/>
                 <a:cs typeface="Consolas" panose="020B0609020204030204" pitchFamily="49" charset="0"/>
               </a:rPr>
-              <a:t>TST</a:t>
+              <a:t>TST r0, #0x80000000</a:t>
             </a:r>
             <a:r>
               <a:rPr lang="en-US" sz="1600" b="1" dirty="0">
@@ -10831,7 +10865,7 @@
                 <a:latin typeface="Consolas" panose="020B0609020204030204" pitchFamily="49" charset="0"/>
                 <a:cs typeface="Consolas" panose="020B0609020204030204" pitchFamily="49" charset="0"/>
               </a:rPr>
-              <a:t> </a:t>
+              <a:t/>
             </a:r>
             <a:r>
               <a:rPr lang="en-US" sz="1600" b="1" dirty="0" err="1">
@@ -10841,7 +10875,7 @@
                 <a:latin typeface="Consolas" panose="020B0609020204030204" pitchFamily="49" charset="0"/>
                 <a:cs typeface="Consolas" panose="020B0609020204030204" pitchFamily="49" charset="0"/>
               </a:rPr>
-              <a:t>r0</a:t>
+              <a:t/>
             </a:r>
             <a:r>
               <a:rPr lang="en-US" sz="1600" b="1" dirty="0">
@@ -10851,7 +10885,7 @@
                 <a:latin typeface="Consolas" panose="020B0609020204030204" pitchFamily="49" charset="0"/>
                 <a:cs typeface="Consolas" panose="020B0609020204030204" pitchFamily="49" charset="0"/>
               </a:rPr>
-              <a:t>, </a:t>
+              <a:t/>
             </a:r>
             <a:r>
               <a:rPr lang="en-US" sz="1600" b="1" dirty="0" err="1">
@@ -10861,7 +10895,7 @@
                 <a:latin typeface="Consolas" panose="020B0609020204030204" pitchFamily="49" charset="0"/>
                 <a:cs typeface="Consolas" panose="020B0609020204030204" pitchFamily="49" charset="0"/>
               </a:rPr>
-              <a:t>0x80000000</a:t>
+              <a:t/>
             </a:r>
             <a:r>
               <a:rPr lang="en-US" sz="1600" b="1" dirty="0">
@@ -10884,6 +10918,40 @@
                 <a:cs typeface="Consolas" panose="020B0609020204030204" pitchFamily="49" charset="0"/>
               </a:rPr>
               <a:t>; Check the sign bit</a:t>
+            </a:r>
+          </a:p>
+          <a:p>
+            <a:pPr marL="0" indent="0">
+              <a:buNone/>
+            </a:pPr>
+            <a:r>
+              <a:rPr lang="en-US" sz="1600" b="1" dirty="0">
+                <a:latin typeface="Consolas" panose="020B0609020204030204" pitchFamily="49" charset="0"/>
+                <a:cs typeface="Consolas" panose="020B0609020204030204" pitchFamily="49" charset="0"/>
+              </a:rPr>
+              <a:t>      </a:t>
+            </a:r>
+            <a:r>
+              <a:rPr lang="en-US" sz="1600" b="1" dirty="0">
+                <a:solidFill>
+                  <a:srgbClr val="C00000"/>
+                </a:solidFill>
+                <a:latin typeface="Consolas" panose="020B0609020204030204" pitchFamily="49" charset="0"/>
+                <a:cs typeface="Consolas" panose="020B0609020204030204" pitchFamily="49" charset="0"/>
+              </a:rPr>
+              <a:t>ITE NE                  </a:t>
+            </a:r>
+            <a:r>
+              <a:rPr lang="en-US" sz="1600" b="1" dirty="0">
+                <a:solidFill>
+                  <a:schemeClr val="bg1">
+                    <a:lumMod val="50000"/>
+                  </a:schemeClr>
+                </a:solidFill>
+                <a:latin typeface="Consolas" panose="020B0609020204030204" pitchFamily="49" charset="0"/>
+                <a:cs typeface="Consolas" panose="020B0609020204030204" pitchFamily="49" charset="0"/>
+              </a:rPr>
+              <a:t>; LDRNE runs if NE, LDREQ (inverse) if EQ</a:t>
             </a:r>
           </a:p>
           <a:p>
@@ -11001,19 +11069,19 @@
           <a:p>
             <a:r>
               <a:rPr lang="en-US" dirty="0"/>
-              <a:t>TST r0, 0x80000000 checks the sign bit of the low 32 bits by ANDing r0 with the mask and sets condition flags without storing a result. Z=0 implies MSB=1 (negative), Z=1 implies MSB=0 (non-negative).</a:t>
+              <a:t>TST r0, #0x80000000 checks the sign bit of the low 32 bits by ANDing r0 with the mask and sets condition flags without storing a result. Z=0 implies MSB=1 (negative), Z=1 implies MSB=0 (non-negative).</a:t>
             </a:r>
           </a:p>
           <a:p>
             <a:r>
               <a:rPr lang="en-US" dirty="0"/>
-              <a:t>LDRNE r1, =0xFFFFFFFF ; if Z=0, sign bit set MSB=1(result non-zero → NE), set upper 32 = all 1s</a:t>
+              <a:t>ITE NE, then LDRNE r1, =0xFFFFFFFF ; if Z=0, sign bit set MSB=1(result non-zero → NE), set upper 32 = all 1s</a:t>
             </a:r>
           </a:p>
           <a:p>
             <a:r>
               <a:rPr lang="en-US" dirty="0"/>
-              <a:t>LDREQ r1, =0x00000000 ; if Z=1, sign bit clear MSB=0 (result zero → EQ),  set upper 32 = all 0s</a:t>
+              <a:t>LDREQ r1, =0x00000000 (the E slot of ITE NE) ; if Z=1, sign bit clear MSB=0 (result zero → EQ),  set upper 32 = all 0s</a:t>
             </a:r>
           </a:p>
         </p:txBody>
@@ -11065,7 +11133,7 @@
           <a:p>
             <a:r>
               <a:rPr lang="en-US" dirty="0"/>
-              <a:t>64-bit Logic Shift Left</a:t>
+              <a:t>64-bit Logical Shift Left</a:t>
             </a:r>
           </a:p>
         </p:txBody>
@@ -11165,7 +11233,7 @@
           <a:p>
             <a:r>
               <a:rPr lang="en-US" dirty="0"/>
-              <a:t>64-bit Logic Shift Left</a:t>
+              <a:t>64-bit Logical Shift Left</a:t>
             </a:r>
           </a:p>
         </p:txBody>
@@ -11218,7 +11286,7 @@
           <a:p>
             <a:r>
               <a:rPr lang="en-US" dirty="0"/>
-              <a:t>Example of Logic Shift Left by 3</a:t>
+              <a:t>Example of Logical Shift Left by 3</a:t>
             </a:r>
           </a:p>
         </p:txBody>
@@ -11312,7 +11380,7 @@
           <a:p>
             <a:r>
               <a:rPr lang="en-US" dirty="0"/>
-              <a:t>64-bit Logic Shift Left</a:t>
+              <a:t>64-bit Logical Shift Left</a:t>
             </a:r>
           </a:p>
         </p:txBody>
